--- a/Report_Simulazioni_PPO.pptx
+++ b/Report_Simulazioni_PPO.pptx
@@ -7283,7 +7283,7 @@
           <a:lstStyle/>
           <a:p>
             <a:r>
-              <a:t>Ottimizzazione Riga Dataset: 3</a:t>
+              <a:t>Ottimizzazione Riga Dataset: 854</a:t>
             </a:r>
           </a:p>
         </p:txBody>
@@ -7304,7 +7304,7 @@
           <a:lstStyle/>
           <a:p>
             <a:r>
-              <a:t>Analisi beta2 e w1 e w2 e tmovxu e tmovxl</a:t>
+              <a:t>Analisi pitch e beta1 e beta2 e w1 e w2 e tmovxu e tmovxl</a:t>
             </a:r>
           </a:p>
         </p:txBody>
@@ -7453,7 +7453,7 @@
           <a:p>
             <a:pPr/>
             <a:r>
-              <a:t>CSI Originale = 0.02461</a:t>
+              <a:t>CSI Originale = 0.02529</a:t>
             </a:r>
           </a:p>
           <a:p>
@@ -7465,31 +7465,43 @@
           <a:p>
             <a:pPr lvl="1"/>
             <a:r>
-              <a:t>DOF_BETA2 da -66.01562 a -66.016</a:t>
+              <a:t>DOF_PITCH da 0.08534236023 a 0.085</a:t>
             </a:r>
           </a:p>
           <a:p>
             <a:pPr lvl="1"/>
             <a:r>
-              <a:t>DOF_W1 da 0.19375 a 0.194</a:t>
+              <a:t>DOF_BETA1 da 13.90686 a 13.907</a:t>
             </a:r>
           </a:p>
           <a:p>
             <a:pPr lvl="1"/>
             <a:r>
-              <a:t>DOF_W2 da 0.2734375 a 0.273</a:t>
+              <a:t>DOF_BETA2 da -69.77264 a -69.773</a:t>
             </a:r>
           </a:p>
           <a:p>
             <a:pPr lvl="1"/>
             <a:r>
-              <a:t>DOF_TMOVXU da 0.01132812 a 0.011</a:t>
+              <a:t>DOF_W1 da 0.3960693 a 0.396</a:t>
             </a:r>
           </a:p>
           <a:p>
             <a:pPr lvl="1"/>
             <a:r>
-              <a:t>DOF_TMOVXL da -0.1417969 a -0.142</a:t>
+              <a:t>DOF_W2 da 0.9958191 a 0.996</a:t>
+            </a:r>
+          </a:p>
+          <a:p>
+            <a:pPr lvl="1"/>
+            <a:r>
+              <a:t>DOF_TMOVXU da -0.08603058 a -0.086</a:t>
+            </a:r>
+          </a:p>
+          <a:p>
+            <a:pPr lvl="1"/>
+            <a:r>
+              <a:t>DOF_TMOVXL da -0.07983551 a -0.080</a:t>
             </a:r>
           </a:p>
           <a:p>
@@ -7635,7 +7647,7 @@
         <p:spPr>
           <a:xfrm>
             <a:off x="914400" y="1371600"/>
-            <a:ext cx="10360152" cy="3754720"/>
+            <a:ext cx="10360152" cy="3560541"/>
           </a:xfrm>
           <a:prstGeom prst="rect">
             <a:avLst/>
@@ -7824,7 +7836,7 @@
         <p:spPr>
           <a:xfrm>
             <a:off x="914400" y="1371600"/>
-            <a:ext cx="10360152" cy="5108342"/>
+            <a:ext cx="10360152" cy="5138809"/>
           </a:xfrm>
           <a:prstGeom prst="rect">
             <a:avLst/>
@@ -7887,7 +7899,7 @@
         <p:spPr>
           <a:xfrm>
             <a:off x="914400" y="1371600"/>
-            <a:ext cx="10360152" cy="3866572"/>
+            <a:ext cx="10360152" cy="3861709"/>
           </a:xfrm>
           <a:prstGeom prst="rect">
             <a:avLst/>
@@ -7936,43 +7948,43 @@
           <a:p>
             <a:pPr/>
             <a:r>
-              <a:t>DOF_PITCH = 0.088357</a:t>
+              <a:t>DOF_PITCH (*) = 0.137973 da 0.085342</a:t>
             </a:r>
           </a:p>
           <a:p>
             <a:pPr/>
             <a:r>
-              <a:t>DOF_BETA1 = 18.281250</a:t>
+              <a:t>DOF_BETA1 (*) = 19.966000 da 13.906860</a:t>
             </a:r>
           </a:p>
           <a:p>
             <a:pPr/>
             <a:r>
-              <a:t>DOF_BETA2 (*) = -61.812206 da -66.015617</a:t>
+              <a:t>DOF_BETA2 (*) = -69.502251 da -69.772636</a:t>
             </a:r>
           </a:p>
           <a:p>
             <a:pPr/>
             <a:r>
-              <a:t>DOF_W1 (*) = 0.435789 da 0.193750</a:t>
+              <a:t>DOF_W1 (*) = 0.592189 da 0.396069</a:t>
             </a:r>
           </a:p>
           <a:p>
             <a:pPr/>
             <a:r>
-              <a:t>DOF_W2 (*) = 0.970247 da 0.273438</a:t>
+              <a:t>DOF_W2 (*) = 0.999000 da 0.995819</a:t>
             </a:r>
           </a:p>
           <a:p>
             <a:pPr/>
             <a:r>
-              <a:t>DOF_TMOVXU (*) = 0.012671 da 0.011328</a:t>
+              <a:t>DOF_TMOVXU (*) = -0.116822 da -0.086031</a:t>
             </a:r>
           </a:p>
           <a:p>
             <a:pPr/>
             <a:r>
-              <a:t>DOF_TMOVXL (*) = 0.129708 da -0.141797</a:t>
+              <a:t>DOF_TMOVXL (*) = 0.200000 da -0.079836</a:t>
             </a:r>
           </a:p>
         </p:txBody>
@@ -8000,91 +8012,91 @@
           <a:p>
             <a:pPr/>
             <a:r>
-              <a:t>OF_alfa_ex = -55.346897 da -61.117001</a:t>
+              <a:t>OF_alfa_ex = -53.058990 da -61.333000</a:t>
             </a:r>
           </a:p>
           <a:p>
             <a:pPr/>
             <a:r>
-              <a:t>OF_Cpt = 0.024586 da 0.026360</a:t>
+              <a:t>OF_Cpt = 0.020396 da 0.027090</a:t>
             </a:r>
           </a:p>
           <a:p>
             <a:pPr/>
             <a:r>
-              <a:t>OF_CSI = 0.023170 da 0.024610</a:t>
+              <a:t>OF_CSI = 0.019447 da 0.025290</a:t>
             </a:r>
           </a:p>
           <a:p>
             <a:pPr/>
             <a:r>
-              <a:t>OF_phi = 0.768100 da 0.611082</a:t>
+              <a:t>OF_phi = 0.831727 da 0.605067</a:t>
             </a:r>
           </a:p>
           <a:p>
             <a:pPr/>
             <a:r>
-              <a:t>OF_psi = 1.271618 da 1.215501</a:t>
+              <a:t>OF_psi = 1.291075 da 1.213379</a:t>
             </a:r>
           </a:p>
           <a:p>
             <a:pPr/>
             <a:r>
-              <a:t>OF_Zwi = 0.949102 da 0.821991</a:t>
+              <a:t>OF_Zwi = 1.493779 da 0.789230</a:t>
             </a:r>
           </a:p>
           <a:p>
             <a:pPr/>
             <a:r>
-              <a:t>OF_Zwc = 0.901718 da 0.785634</a:t>
+              <a:t>OF_Zwc = 1.440847 da 0.754341</a:t>
             </a:r>
           </a:p>
           <a:p>
             <a:pPr/>
             <a:r>
-              <a:t>OF_DFss_mis = 1.208487 da 1.191800</a:t>
+              <a:t>OF_DFss_mis = 1.467339 da 1.209000</a:t>
             </a:r>
           </a:p>
           <a:p>
             <a:pPr/>
             <a:r>
-              <a:t>OF_DFss_cp = 0.953827 da 0.957700</a:t>
+              <a:t>OF_DFss_cp = 0.898844 da 0.954000</a:t>
             </a:r>
           </a:p>
           <a:p>
             <a:pPr/>
             <a:r>
-              <a:t>OF_Mis_peak = 0.468940 da 0.465100</a:t>
+              <a:t>OF_Mis_peak = 0.537746 da 0.469800</a:t>
             </a:r>
           </a:p>
           <a:p>
             <a:pPr/>
             <a:r>
-              <a:t>OF_s_peak = 0.718583 da 0.705900</a:t>
+              <a:t>OF_s_peak = 0.548241 da 0.771000</a:t>
             </a:r>
           </a:p>
           <a:p>
             <a:pPr/>
             <a:r>
-              <a:t>OF_s_diff_dim = 0.038071 da 0.042110</a:t>
+              <a:t>OF_s_diff_dim = 0.066278 da 0.032590</a:t>
             </a:r>
           </a:p>
           <a:p>
             <a:pPr/>
             <a:r>
-              <a:t>OF_s_tot_SS = 0.133817 da 0.143200</a:t>
+              <a:t>OF_s_tot_SS = 0.139031 da 0.142300</a:t>
             </a:r>
           </a:p>
           <a:p>
             <a:pPr/>
             <a:r>
-              <a:t>OF_Tmax = 0.012258 da 0.012120</a:t>
+              <a:t>OF_Tmax = 0.011965 da 0.012320</a:t>
             </a:r>
           </a:p>
           <a:p>
             <a:pPr/>
             <a:r>
-              <a:t>OF_X_Tmax = 0.277609 da 0.213500</a:t>
+              <a:t>OF_X_Tmax = 0.257341 da 0.170215</a:t>
             </a:r>
           </a:p>
         </p:txBody>
